--- a/CalendarioAgo25/Presentaciones/9_2_VPNs_IPsec.pptx
+++ b/CalendarioAgo25/Presentaciones/9_2_VPNs_IPsec.pptx
@@ -144,6 +144,35 @@
 </p:presentation>
 </file>
 
+<file path=ppt/changesInfos/changesInfo1.xml><?xml version="1.0" encoding="utf-8"?>
+<pc:chgInfo xmlns:a="http://schemas.openxmlformats.org/drawingml/2006/main" xmlns:r="http://schemas.openxmlformats.org/officeDocument/2006/relationships" xmlns:ac="http://schemas.microsoft.com/office/drawing/2013/main/command" xmlns:pc="http://schemas.microsoft.com/office/powerpoint/2013/main/command">
+  <pc:docChgLst>
+    <pc:chgData name="Lizethe Pérez Fuertes" userId="4ae9ef87-2a7d-42f8-8dfa-0a501a9e2ff4" providerId="ADAL" clId="{FDDD45CB-1330-4033-A842-3D2746AFF7C7}"/>
+    <pc:docChg chg="modSld">
+      <pc:chgData name="Lizethe Pérez Fuertes" userId="4ae9ef87-2a7d-42f8-8dfa-0a501a9e2ff4" providerId="ADAL" clId="{FDDD45CB-1330-4033-A842-3D2746AFF7C7}" dt="2025-11-04T16:49:06.230" v="0" actId="20577"/>
+      <pc:docMkLst>
+        <pc:docMk/>
+      </pc:docMkLst>
+      <pc:sldChg chg="modSp mod">
+        <pc:chgData name="Lizethe Pérez Fuertes" userId="4ae9ef87-2a7d-42f8-8dfa-0a501a9e2ff4" providerId="ADAL" clId="{FDDD45CB-1330-4033-A842-3D2746AFF7C7}" dt="2025-11-04T16:49:06.230" v="0" actId="20577"/>
+        <pc:sldMkLst>
+          <pc:docMk/>
+          <pc:sldMk cId="3094826" sldId="1213"/>
+        </pc:sldMkLst>
+        <pc:spChg chg="mod">
+          <ac:chgData name="Lizethe Pérez Fuertes" userId="4ae9ef87-2a7d-42f8-8dfa-0a501a9e2ff4" providerId="ADAL" clId="{FDDD45CB-1330-4033-A842-3D2746AFF7C7}" dt="2025-11-04T16:49:06.230" v="0" actId="20577"/>
+          <ac:spMkLst>
+            <pc:docMk/>
+            <pc:sldMk cId="3094826" sldId="1213"/>
+            <ac:spMk id="2" creationId="{00000000-0000-0000-0000-000000000000}"/>
+          </ac:spMkLst>
+        </pc:spChg>
+      </pc:sldChg>
+    </pc:docChg>
+  </pc:docChgLst>
+</pc:chgInfo>
+</file>
+
 <file path=ppt/notesMasters/notesMaster1.xml><?xml version="1.0" encoding="utf-8"?>
 <p:notesMaster xmlns:a="http://schemas.openxmlformats.org/drawingml/2006/main" xmlns:r="http://schemas.openxmlformats.org/officeDocument/2006/relationships" xmlns:p="http://schemas.openxmlformats.org/presentationml/2006/main">
   <p:cSld>
@@ -226,7 +255,7 @@
           <a:p>
             <a:fld id="{2D445F07-8756-451B-A938-0248325FC7BB}" type="datetimeFigureOut">
               <a:rPr lang="es-MX" smtClean="0"/>
-              <a:t>21/05/2024</a:t>
+              <a:t>04/11/2025</a:t>
             </a:fld>
             <a:endParaRPr lang="es-MX" dirty="0"/>
           </a:p>
@@ -385,7 +414,7 @@
           <a:p>
             <a:fld id="{5993AEC0-242E-4FA7-9D3C-51E1036AC3CB}" type="slidenum">
               <a:rPr lang="es-MX" smtClean="0"/>
-              <a:t>‹#›</a:t>
+              <a:t>‹Nº›</a:t>
             </a:fld>
             <a:endParaRPr lang="es-MX" dirty="0"/>
           </a:p>
@@ -2187,7 +2216,7 @@
           <a:p>
             <a:fld id="{5E75A0DC-66C6-4CEC-A5EB-F8C97CEC3796}" type="datetimeFigureOut">
               <a:rPr lang="es-MX" smtClean="0"/>
-              <a:t>21/05/2024</a:t>
+              <a:t>04/11/2025</a:t>
             </a:fld>
             <a:endParaRPr lang="es-MX" dirty="0"/>
           </a:p>
@@ -2229,7 +2258,7 @@
           <a:p>
             <a:fld id="{C077EE1E-7A06-4E7F-9AFB-189FC69B7B0C}" type="slidenum">
               <a:rPr lang="es-MX" smtClean="0"/>
-              <a:t>‹#›</a:t>
+              <a:t>‹Nº›</a:t>
             </a:fld>
             <a:endParaRPr lang="es-MX" dirty="0"/>
           </a:p>
@@ -2357,7 +2386,7 @@
           <a:p>
             <a:fld id="{5E75A0DC-66C6-4CEC-A5EB-F8C97CEC3796}" type="datetimeFigureOut">
               <a:rPr lang="es-MX" smtClean="0"/>
-              <a:t>21/05/2024</a:t>
+              <a:t>04/11/2025</a:t>
             </a:fld>
             <a:endParaRPr lang="es-MX" dirty="0"/>
           </a:p>
@@ -2399,7 +2428,7 @@
           <a:p>
             <a:fld id="{C077EE1E-7A06-4E7F-9AFB-189FC69B7B0C}" type="slidenum">
               <a:rPr lang="es-MX" smtClean="0"/>
-              <a:t>‹#›</a:t>
+              <a:t>‹Nº›</a:t>
             </a:fld>
             <a:endParaRPr lang="es-MX" dirty="0"/>
           </a:p>
@@ -2537,7 +2566,7 @@
           <a:p>
             <a:fld id="{5E75A0DC-66C6-4CEC-A5EB-F8C97CEC3796}" type="datetimeFigureOut">
               <a:rPr lang="es-MX" smtClean="0"/>
-              <a:t>21/05/2024</a:t>
+              <a:t>04/11/2025</a:t>
             </a:fld>
             <a:endParaRPr lang="es-MX" dirty="0"/>
           </a:p>
@@ -2579,7 +2608,7 @@
           <a:p>
             <a:fld id="{C077EE1E-7A06-4E7F-9AFB-189FC69B7B0C}" type="slidenum">
               <a:rPr lang="es-MX" smtClean="0"/>
-              <a:t>‹#›</a:t>
+              <a:t>‹Nº›</a:t>
             </a:fld>
             <a:endParaRPr lang="es-MX" dirty="0"/>
           </a:p>
@@ -2869,7 +2898,7 @@
           <a:p>
             <a:fld id="{5E75A0DC-66C6-4CEC-A5EB-F8C97CEC3796}" type="datetimeFigureOut">
               <a:rPr lang="es-MX" smtClean="0"/>
-              <a:t>21/05/2024</a:t>
+              <a:t>04/11/2025</a:t>
             </a:fld>
             <a:endParaRPr lang="es-MX" dirty="0"/>
           </a:p>
@@ -2911,7 +2940,7 @@
           <a:p>
             <a:fld id="{C077EE1E-7A06-4E7F-9AFB-189FC69B7B0C}" type="slidenum">
               <a:rPr lang="es-MX" smtClean="0"/>
-              <a:t>‹#›</a:t>
+              <a:t>‹Nº›</a:t>
             </a:fld>
             <a:endParaRPr lang="es-MX" dirty="0"/>
           </a:p>
@@ -3115,7 +3144,7 @@
           <a:p>
             <a:fld id="{5E75A0DC-66C6-4CEC-A5EB-F8C97CEC3796}" type="datetimeFigureOut">
               <a:rPr lang="es-MX" smtClean="0"/>
-              <a:t>21/05/2024</a:t>
+              <a:t>04/11/2025</a:t>
             </a:fld>
             <a:endParaRPr lang="es-MX" dirty="0"/>
           </a:p>
@@ -3157,7 +3186,7 @@
           <a:p>
             <a:fld id="{C077EE1E-7A06-4E7F-9AFB-189FC69B7B0C}" type="slidenum">
               <a:rPr lang="es-MX" smtClean="0"/>
-              <a:t>‹#›</a:t>
+              <a:t>‹Nº›</a:t>
             </a:fld>
             <a:endParaRPr lang="es-MX" dirty="0"/>
           </a:p>
@@ -3403,7 +3432,7 @@
           <a:p>
             <a:fld id="{5E75A0DC-66C6-4CEC-A5EB-F8C97CEC3796}" type="datetimeFigureOut">
               <a:rPr lang="es-MX" smtClean="0"/>
-              <a:t>21/05/2024</a:t>
+              <a:t>04/11/2025</a:t>
             </a:fld>
             <a:endParaRPr lang="es-MX" dirty="0"/>
           </a:p>
@@ -3445,7 +3474,7 @@
           <a:p>
             <a:fld id="{C077EE1E-7A06-4E7F-9AFB-189FC69B7B0C}" type="slidenum">
               <a:rPr lang="es-MX" smtClean="0"/>
-              <a:t>‹#›</a:t>
+              <a:t>‹Nº›</a:t>
             </a:fld>
             <a:endParaRPr lang="es-MX" dirty="0"/>
           </a:p>
@@ -3825,7 +3854,7 @@
           <a:p>
             <a:fld id="{5E75A0DC-66C6-4CEC-A5EB-F8C97CEC3796}" type="datetimeFigureOut">
               <a:rPr lang="es-MX" smtClean="0"/>
-              <a:t>21/05/2024</a:t>
+              <a:t>04/11/2025</a:t>
             </a:fld>
             <a:endParaRPr lang="es-MX" dirty="0"/>
           </a:p>
@@ -3867,7 +3896,7 @@
           <a:p>
             <a:fld id="{C077EE1E-7A06-4E7F-9AFB-189FC69B7B0C}" type="slidenum">
               <a:rPr lang="es-MX" smtClean="0"/>
-              <a:t>‹#›</a:t>
+              <a:t>‹Nº›</a:t>
             </a:fld>
             <a:endParaRPr lang="es-MX" dirty="0"/>
           </a:p>
@@ -3943,7 +3972,7 @@
           <a:p>
             <a:fld id="{5E75A0DC-66C6-4CEC-A5EB-F8C97CEC3796}" type="datetimeFigureOut">
               <a:rPr lang="es-MX" smtClean="0"/>
-              <a:t>21/05/2024</a:t>
+              <a:t>04/11/2025</a:t>
             </a:fld>
             <a:endParaRPr lang="es-MX" dirty="0"/>
           </a:p>
@@ -3985,7 +4014,7 @@
           <a:p>
             <a:fld id="{C077EE1E-7A06-4E7F-9AFB-189FC69B7B0C}" type="slidenum">
               <a:rPr lang="es-MX" smtClean="0"/>
-              <a:t>‹#›</a:t>
+              <a:t>‹Nº›</a:t>
             </a:fld>
             <a:endParaRPr lang="es-MX" dirty="0"/>
           </a:p>
@@ -4038,7 +4067,7 @@
           <a:p>
             <a:fld id="{5E75A0DC-66C6-4CEC-A5EB-F8C97CEC3796}" type="datetimeFigureOut">
               <a:rPr lang="es-MX" smtClean="0"/>
-              <a:t>21/05/2024</a:t>
+              <a:t>04/11/2025</a:t>
             </a:fld>
             <a:endParaRPr lang="es-MX" dirty="0"/>
           </a:p>
@@ -4080,7 +4109,7 @@
           <a:p>
             <a:fld id="{C077EE1E-7A06-4E7F-9AFB-189FC69B7B0C}" type="slidenum">
               <a:rPr lang="es-MX" smtClean="0"/>
-              <a:t>‹#›</a:t>
+              <a:t>‹Nº›</a:t>
             </a:fld>
             <a:endParaRPr lang="es-MX" dirty="0"/>
           </a:p>
@@ -4315,7 +4344,7 @@
           <a:p>
             <a:fld id="{5E75A0DC-66C6-4CEC-A5EB-F8C97CEC3796}" type="datetimeFigureOut">
               <a:rPr lang="es-MX" smtClean="0"/>
-              <a:t>21/05/2024</a:t>
+              <a:t>04/11/2025</a:t>
             </a:fld>
             <a:endParaRPr lang="es-MX" dirty="0"/>
           </a:p>
@@ -4357,7 +4386,7 @@
           <a:p>
             <a:fld id="{C077EE1E-7A06-4E7F-9AFB-189FC69B7B0C}" type="slidenum">
               <a:rPr lang="es-MX" smtClean="0"/>
-              <a:t>‹#›</a:t>
+              <a:t>‹Nº›</a:t>
             </a:fld>
             <a:endParaRPr lang="es-MX" dirty="0"/>
           </a:p>
@@ -4568,7 +4597,7 @@
           <a:p>
             <a:fld id="{5E75A0DC-66C6-4CEC-A5EB-F8C97CEC3796}" type="datetimeFigureOut">
               <a:rPr lang="es-MX" smtClean="0"/>
-              <a:t>21/05/2024</a:t>
+              <a:t>04/11/2025</a:t>
             </a:fld>
             <a:endParaRPr lang="es-MX" dirty="0"/>
           </a:p>
@@ -4610,7 +4639,7 @@
           <a:p>
             <a:fld id="{C077EE1E-7A06-4E7F-9AFB-189FC69B7B0C}" type="slidenum">
               <a:rPr lang="es-MX" smtClean="0"/>
-              <a:t>‹#›</a:t>
+              <a:t>‹Nº›</a:t>
             </a:fld>
             <a:endParaRPr lang="es-MX" dirty="0"/>
           </a:p>
@@ -4781,7 +4810,7 @@
           <a:p>
             <a:fld id="{5E75A0DC-66C6-4CEC-A5EB-F8C97CEC3796}" type="datetimeFigureOut">
               <a:rPr lang="es-MX" smtClean="0"/>
-              <a:t>21/05/2024</a:t>
+              <a:t>04/11/2025</a:t>
             </a:fld>
             <a:endParaRPr lang="es-MX" dirty="0"/>
           </a:p>
@@ -4859,7 +4888,7 @@
           <a:p>
             <a:fld id="{C077EE1E-7A06-4E7F-9AFB-189FC69B7B0C}" type="slidenum">
               <a:rPr lang="es-MX" smtClean="0"/>
-              <a:t>‹#›</a:t>
+              <a:t>‹Nº›</a:t>
             </a:fld>
             <a:endParaRPr lang="es-MX" dirty="0"/>
           </a:p>
@@ -11597,7 +11626,7 @@
                 <a:latin typeface="Arial" panose="020B0604020202020204" pitchFamily="34" charset="0"/>
                 <a:cs typeface="Arial" panose="020B0604020202020204" pitchFamily="34" charset="0"/>
               </a:rPr>
-              <a:t>Una algoritmo </a:t>
+              <a:t>Un algoritmo </a:t>
             </a:r>
             <a:r>
               <a:rPr lang="es-ES" sz="1600" b="1" dirty="0">
